--- a/teaching/slides/day1_foundations.pptx
+++ b/teaching/slides/day1_foundations.pptx
@@ -4486,7 +4486,7 @@
                 </a:solidFill>
                 <a:latin typeface="Consolas"/>
               </a:rPr>
-              <a:t>ggplot(milestones, aes(year, y, colour = jurisdiction)) + ...</a:t>
+              <a:t>ggplot(milestones, aes(year, 0, colour = jurisdiction)) + ...</a:t>
             </a:r>
           </a:p>
           <a:p>
@@ -6455,7 +6455,26 @@
                 </a:solidFill>
                 <a:latin typeface="Consolas"/>
               </a:rPr>
-              <a:t>shares &lt;- c(A=0.40, B=0.30, C=0.20, D=0.10)</a:t>
+              <a:t>shares &lt;- data.frame(firm=c("A","B","C","D"),</a:t>
+            </a:r>
+          </a:p>
+          <a:p>
+            <a:pPr algn="l">
+              <a:lnSpc>
+                <a:spcPct val="100000"/>
+              </a:lnSpc>
+              <a:spcAft>
+                <a:spcPts val="200"/>
+              </a:spcAft>
+            </a:pPr>
+            <a:r>
+              <a:rPr sz="1400" b="0" i="0">
+                <a:solidFill>
+                  <a:srgbClr val="E6E6E6"/>
+                </a:solidFill>
+                <a:latin typeface="Consolas"/>
+              </a:rPr>
+              <a:t>                     share=c(0.40,0.30,0.20,0.10))</a:t>
             </a:r>
           </a:p>
           <a:p>
@@ -9272,7 +9291,7 @@
               </a:spcAft>
             </a:pPr>
             <a:r>
-              <a:rPr sz="1900" b="0" i="0">
+              <a:rPr sz="1900" b="1" i="0">
                 <a:solidFill>
                   <a:srgbClr val="222222"/>
                 </a:solidFill>
@@ -9291,7 +9310,7 @@
               </a:spcAft>
             </a:pPr>
             <a:r>
-              <a:rPr sz="1900" b="0" i="0">
+              <a:rPr sz="1900" b="1" i="0">
                 <a:solidFill>
                   <a:srgbClr val="222222"/>
                 </a:solidFill>
